--- a/Topic_C/Exam_Practice/TC-L09_Writing_Workshop_Shopping_Prices_Consumer_Choices.pptx
+++ b/Topic_C/Exam_Practice/TC-L09_Writing_Workshop_Shopping_Prices_Consumer_Choices.pptx
@@ -784,7 +784,11 @@
           <a:lstStyle/>
           <a:p>
             <a:r>
-              <a:rPr lang="en-US" dirty="0"/>
+              <a:rPr lang="ar-SA" dirty="0">
+                <a:latin typeface="Amiri" pitchFamily="2" charset="-78"/>
+                <a:ea typeface="Amiri" pitchFamily="2" charset="-78"/>
+                <a:cs typeface="Amiri" pitchFamily="2" charset="-78"/>
+              </a:rPr>
               <a:t>Q3 (3 min to choose and read). Title (أ) suits Core and Develop; title (ب) suits Stretch.</a:t>
             </a:r>
             <a:endParaRPr lang="en-US" dirty="0"/>
@@ -1403,7 +1407,11 @@
           <a:lstStyle/>
           <a:p>
             <a:r>
-              <a:rPr lang="en-US" dirty="0"/>
+              <a:rPr lang="ar-SA" dirty="0">
+                <a:latin typeface="Amiri" pitchFamily="2" charset="-78"/>
+                <a:ea typeface="Amiri" pitchFamily="2" charset="-78"/>
+                <a:cs typeface="Amiri" pitchFamily="2" charset="-78"/>
+              </a:rPr>
               <a:t>WELCOME (1 min) — while students join.
 • Greet each student by name as they arrive: السَّلَامُ عَلَيْكُمْ. Take the register (Pastoral Tracker: attendance 0/1).
 • 2-MINUTE CHECK-IN (SEND training): a private chat to any student who seemed unsettled last lesson — “Are you okay today? 👍 / 👎”.
@@ -1936,7 +1944,11 @@
           <a:lstStyle/>
           <a:p>
             <a:r>
-              <a:rPr lang="en-US" dirty="0"/>
+              <a:rPr lang="ar-SA" dirty="0">
+                <a:latin typeface="Amiri" pitchFamily="2" charset="-78"/>
+                <a:ea typeface="Amiri" pitchFamily="2" charset="-78"/>
+                <a:cs typeface="Amiri" pitchFamily="2" charset="-78"/>
+              </a:rPr>
               <a:t>Question words: مَاذَا (what) · مَتَى (when) · كَمْ (how much) · كَيْفَ (how) · لِمَاذَا (why) — bullet 1 is PAST, bullet 4 is a request.</a:t>
             </a:r>
             <a:endParaRPr lang="en-US" dirty="0"/>
@@ -2508,6 +2520,7 @@
                   <a:srgbClr val="D4AF37"/>
                 </a:solidFill>
                 <a:latin typeface="Amiri" pitchFamily="2" charset="-78"/>
+                <a:ea typeface="Amiri" pitchFamily="2" charset="-78"/>
                 <a:cs typeface="Amiri" pitchFamily="2" charset="-78"/>
               </a:rPr>
               <a:t>م</a:t>
@@ -2714,6 +2727,7 @@
                   <a:srgbClr val="D4AF37"/>
                 </a:solidFill>
                 <a:latin typeface="Amiri" pitchFamily="2" charset="-78"/>
+                <a:ea typeface="Amiri" pitchFamily="2" charset="-78"/>
                 <a:cs typeface="Amiri" pitchFamily="2" charset="-78"/>
               </a:rPr>
               <a:t>وَرْشَةُ الكِتَابَةِ — التَّسَوُّقُ وَالأَسْعَارُ</a:t>
@@ -3171,6 +3185,7 @@
                   <a:srgbClr val="D4AF37"/>
                 </a:solidFill>
                 <a:latin typeface="Amiri" pitchFamily="2" charset="-78"/>
+                <a:ea typeface="Amiri" pitchFamily="2" charset="-78"/>
                 <a:cs typeface="Amiri" pitchFamily="2" charset="-78"/>
               </a:rPr>
               <a:t>م</a:t>
@@ -3491,6 +3506,7 @@
                   <a:srgbClr val="8A6D1E"/>
                 </a:solidFill>
                 <a:latin typeface="Amiri" pitchFamily="2" charset="-78"/>
+                <a:ea typeface="Amiri" pitchFamily="2" charset="-78"/>
                 <a:cs typeface="Amiri" pitchFamily="2" charset="-78"/>
               </a:rPr>
               <a:t>نَمُوذَجُ الإِجَابَةِ</a:t>
@@ -3604,6 +3620,7 @@
                   <a:srgbClr val="1F2A37"/>
                 </a:solidFill>
                 <a:latin typeface="Amiri" pitchFamily="2" charset="-78"/>
+                <a:ea typeface="Amiri" pitchFamily="2" charset="-78"/>
                 <a:cs typeface="Amiri" pitchFamily="2" charset="-78"/>
               </a:rPr>
               <a:t>إِلَى قِسْمِ خِدْمَةِ العُمَلَاءِ،</a:t>
@@ -3623,6 +3640,7 @@
                   <a:srgbClr val="1F2A37"/>
                 </a:solidFill>
                 <a:latin typeface="Amiri" pitchFamily="2" charset="-78"/>
+                <a:ea typeface="Amiri" pitchFamily="2" charset="-78"/>
                 <a:cs typeface="Amiri" pitchFamily="2" charset="-78"/>
               </a:rPr>
               <a:t>اسْمِي رِيمُ حَسَنٌ. فِي الأُسْبُوعِ المَاضِي اشْتَرَيْتُ مِنْ مَوْقِعِكُمْ حَقِيبَةً مَدْرَسِيَّةً سَوْدَاءَ، وَكَانَ ثَمَنُهَا أَرْبَعِينَ جُنَيْهًا. وَصَلَتِ الحَقِيبَةُ أَمْسِ، لٰكِنَّ السَّحَّابَ مَكْسُورٌ، وَلَوْنَهَا رَمَادِيٌّ لَا أَسْوَدُ. أَنَا حَزِينَةٌ، لِأَنِّي أَحْتَاجُ إِلَيْهَا لِلْمَدْرَسَةِ يَوْمَ الاثْنَيْنِ. فِي رَأْيِي، الحَقِيبَةُ فِي الصُّورَةِ أَجْمَلُ بِكَثِيرٍ. أُرِيدُ أَنْ أُبَدِّلَهَا بِحَقِيبَةٍ جَدِيدَةٍ سَوْدَاءَ، أَوْ أَنْ أَسْتَرِدَّ ثَمَنَهَا. سَأُرْسِلُ لَكُمْ صُورَةً لِلْحَقِيبَةِ وَالإِيصَالِ.</a:t>
@@ -3642,6 +3660,7 @@
                   <a:srgbClr val="1F2A37"/>
                 </a:solidFill>
                 <a:latin typeface="Amiri" pitchFamily="2" charset="-78"/>
+                <a:ea typeface="Amiri" pitchFamily="2" charset="-78"/>
                 <a:cs typeface="Amiri" pitchFamily="2" charset="-78"/>
               </a:rPr>
               <a:t>مَعَ الشُّكْرِ،</a:t>
@@ -3661,6 +3680,7 @@
                   <a:srgbClr val="1F2A37"/>
                 </a:solidFill>
                 <a:latin typeface="Amiri" pitchFamily="2" charset="-78"/>
+                <a:ea typeface="Amiri" pitchFamily="2" charset="-78"/>
                 <a:cs typeface="Amiri" pitchFamily="2" charset="-78"/>
               </a:rPr>
               <a:t>رِيمُ حَسَنٌ</a:t>
@@ -3824,11 +3844,12 @@
               <a:buNone/>
             </a:pPr>
             <a:r>
-              <a:rPr lang="en-US" sz="950" b="1" dirty="0">
+              <a:rPr lang="ar-SA" sz="950" b="1" dirty="0">
                 <a:solidFill>
                   <a:srgbClr val="FFFFFF"/>
                 </a:solidFill>
                 <a:latin typeface="Calibri" pitchFamily="34" charset="0"/>
+                <a:ea typeface="Amiri" pitchFamily="2" charset="-78"/>
                 <a:cs typeface="Amiri" pitchFamily="2" charset="-78"/>
               </a:rPr>
               <a:t>كَانَ ثَمَنُهَا أَرْبَعِينَ</a:t>
@@ -3889,11 +3910,12 @@
               <a:buNone/>
             </a:pPr>
             <a:r>
-              <a:rPr lang="en-US" sz="950" b="1" dirty="0">
+              <a:rPr lang="ar-SA" sz="950" b="1" dirty="0">
                 <a:solidFill>
                   <a:srgbClr val="FFFFFF"/>
                 </a:solidFill>
                 <a:latin typeface="Calibri" pitchFamily="34" charset="0"/>
+                <a:ea typeface="Amiri" pitchFamily="2" charset="-78"/>
                 <a:cs typeface="Amiri" pitchFamily="2" charset="-78"/>
               </a:rPr>
               <a:t>السَّحَّابَ مَكْسُورٌ</a:t>
@@ -3954,11 +3976,12 @@
               <a:buNone/>
             </a:pPr>
             <a:r>
-              <a:rPr lang="en-US" sz="950" b="1" dirty="0">
+              <a:rPr lang="ar-SA" sz="950" b="1" dirty="0">
                 <a:solidFill>
                   <a:srgbClr val="FFFFFF"/>
                 </a:solidFill>
                 <a:latin typeface="Calibri" pitchFamily="34" charset="0"/>
+                <a:ea typeface="Amiri" pitchFamily="2" charset="-78"/>
                 <a:cs typeface="Amiri" pitchFamily="2" charset="-78"/>
               </a:rPr>
               <a:t>أَحْتَاجُ إِلَيْهَا</a:t>
@@ -4019,11 +4042,12 @@
               <a:buNone/>
             </a:pPr>
             <a:r>
-              <a:rPr lang="en-US" sz="950" b="1" dirty="0">
+              <a:rPr lang="ar-SA" sz="950" b="1" dirty="0">
                 <a:solidFill>
                   <a:srgbClr val="FFFFFF"/>
                 </a:solidFill>
                 <a:latin typeface="Calibri" pitchFamily="34" charset="0"/>
+                <a:ea typeface="Amiri" pitchFamily="2" charset="-78"/>
                 <a:cs typeface="Amiri" pitchFamily="2" charset="-78"/>
               </a:rPr>
               <a:t>أَنْ أَسْتَرِدَّ ثَمَنَهَا</a:t>
@@ -4157,6 +4181,7 @@
                   <a:srgbClr val="D4AF37"/>
                 </a:solidFill>
                 <a:latin typeface="Amiri" pitchFamily="2" charset="-78"/>
+                <a:ea typeface="Amiri" pitchFamily="2" charset="-78"/>
                 <a:cs typeface="Amiri" pitchFamily="2" charset="-78"/>
               </a:rPr>
               <a:t>م</a:t>
@@ -4477,6 +4502,7 @@
                   <a:srgbClr val="8A6D1E"/>
                 </a:solidFill>
                 <a:latin typeface="Amiri" pitchFamily="2" charset="-78"/>
+                <a:ea typeface="Amiri" pitchFamily="2" charset="-78"/>
                 <a:cs typeface="Amiri" pitchFamily="2" charset="-78"/>
               </a:rPr>
               <a:t>نَمُوذَجُ الإِجَابَةِ</a:t>
@@ -4590,6 +4616,7 @@
                   <a:srgbClr val="1F2A37"/>
                 </a:solidFill>
                 <a:latin typeface="Amiri" pitchFamily="2" charset="-78"/>
+                <a:ea typeface="Amiri" pitchFamily="2" charset="-78"/>
                 <a:cs typeface="Amiri" pitchFamily="2" charset="-78"/>
               </a:rPr>
               <a:t>حَضْرَةَ مُدِيرِ خِدْمَةِ العُمَلَاءِ المُحْتَرَمِ،</a:t>
@@ -4609,6 +4636,7 @@
                   <a:srgbClr val="1F2A37"/>
                 </a:solidFill>
                 <a:latin typeface="Amiri" pitchFamily="2" charset="-78"/>
+                <a:ea typeface="Amiri" pitchFamily="2" charset="-78"/>
                 <a:cs typeface="Amiri" pitchFamily="2" charset="-78"/>
               </a:rPr>
               <a:t>أَكْتُبُ إِلَيْكُمْ بِخُصُوصِ طَلَبٍ رَقْمُهُ ٤٥٢٧، اشْتَرَيْتُ فِيهِ مِنْ مَوْقِعِكُمْ حَقِيبَةً جِلْدِيَّةً سَوْدَاءَ بِأَرْبَعِينَ جُنَيْهًا، وَكُنْتُ قَدِ اخْتَرْتُهَا لِأَنَّ التَّعْلِيقَاتِ عَلَيْهَا كَانَتْ مُمْتَازَةً. غَيْرَ أَنَّ الحَقِيبَةَ الَّتِي وَصَلَتْنِي أَمْسِ رَمَادِيَّةٌ لَا سَوْدَاءُ، وَسَحَّابُهَا الرَّئِيسِيُّ مَكْسُورٌ، مِمَّا يَجْعَلُهَا غَيْرَ صَالِحَةٍ لِلِاسْتِخْدَامِ. وَبِمَا أَنَّ الدِّرَاسَةَ تَبْدَأُ يَوْمَ الاثْنَيْنِ، فَأَرْجُو أَنْ تُرْسِلُوا لِي حَقِيبَةً بَدِيلَةً قَبْلَ نِهَايَةِ الأُسْبُوعِ. وَإِذَا لَمْ يَكُنْ ذٰلِكَ مُمْكِنًا، فَسَأَطْلُبُ اسْتِرْدَادَ المَبْلَغِ كَامِلًا. تَجِدُونَ مُرْفَقًا صُورَةَ الإِيصَالِ وَالعَيْبِ.</a:t>
@@ -4628,6 +4656,7 @@
                   <a:srgbClr val="1F2A37"/>
                 </a:solidFill>
                 <a:latin typeface="Amiri" pitchFamily="2" charset="-78"/>
+                <a:ea typeface="Amiri" pitchFamily="2" charset="-78"/>
                 <a:cs typeface="Amiri" pitchFamily="2" charset="-78"/>
               </a:rPr>
               <a:t>وَتَفَضَّلُوا بِقَبُولِ فَائِقِ الاحْتِرَامِ،</a:t>
@@ -4647,6 +4676,7 @@
                   <a:srgbClr val="1F2A37"/>
                 </a:solidFill>
                 <a:latin typeface="Amiri" pitchFamily="2" charset="-78"/>
+                <a:ea typeface="Amiri" pitchFamily="2" charset="-78"/>
                 <a:cs typeface="Amiri" pitchFamily="2" charset="-78"/>
               </a:rPr>
               <a:t>رِيمُ حَسَنٌ</a:t>
@@ -4810,11 +4840,12 @@
               <a:buNone/>
             </a:pPr>
             <a:r>
-              <a:rPr lang="en-US" sz="950" b="1" dirty="0">
+              <a:rPr lang="ar-SA" sz="950" b="1" dirty="0">
                 <a:solidFill>
                   <a:srgbClr val="FFFFFF"/>
                 </a:solidFill>
                 <a:latin typeface="Calibri" pitchFamily="34" charset="0"/>
+                <a:ea typeface="Amiri" pitchFamily="2" charset="-78"/>
                 <a:cs typeface="Amiri" pitchFamily="2" charset="-78"/>
               </a:rPr>
               <a:t>بِخُصُوصِ طَلَبٍ</a:t>
@@ -4875,11 +4906,12 @@
               <a:buNone/>
             </a:pPr>
             <a:r>
-              <a:rPr lang="en-US" sz="950" b="1" dirty="0">
+              <a:rPr lang="ar-SA" sz="950" b="1" dirty="0">
                 <a:solidFill>
                   <a:srgbClr val="FFFFFF"/>
                 </a:solidFill>
                 <a:latin typeface="Calibri" pitchFamily="34" charset="0"/>
+                <a:ea typeface="Amiri" pitchFamily="2" charset="-78"/>
                 <a:cs typeface="Amiri" pitchFamily="2" charset="-78"/>
               </a:rPr>
               <a:t>كُنْتُ قَدِ اخْتَرْتُهَا</a:t>
@@ -4940,11 +4972,12 @@
               <a:buNone/>
             </a:pPr>
             <a:r>
-              <a:rPr lang="en-US" sz="950" b="1" dirty="0">
+              <a:rPr lang="ar-SA" sz="950" b="1" dirty="0">
                 <a:solidFill>
                   <a:srgbClr val="FFFFFF"/>
                 </a:solidFill>
                 <a:latin typeface="Calibri" pitchFamily="34" charset="0"/>
+                <a:ea typeface="Amiri" pitchFamily="2" charset="-78"/>
                 <a:cs typeface="Amiri" pitchFamily="2" charset="-78"/>
               </a:rPr>
               <a:t>مِمَّا يَجْعَلُهَا</a:t>
@@ -5005,11 +5038,12 @@
               <a:buNone/>
             </a:pPr>
             <a:r>
-              <a:rPr lang="en-US" sz="950" b="1" dirty="0">
+              <a:rPr lang="ar-SA" sz="950" b="1" dirty="0">
                 <a:solidFill>
                   <a:srgbClr val="FFFFFF"/>
                 </a:solidFill>
                 <a:latin typeface="Calibri" pitchFamily="34" charset="0"/>
+                <a:ea typeface="Amiri" pitchFamily="2" charset="-78"/>
                 <a:cs typeface="Amiri" pitchFamily="2" charset="-78"/>
               </a:rPr>
               <a:t>إِذَا لَمْ يَكُنْ … فَسَأَطْلُبُ</a:t>
@@ -5143,6 +5177,7 @@
                   <a:srgbClr val="D4AF37"/>
                 </a:solidFill>
                 <a:latin typeface="Amiri" pitchFamily="2" charset="-78"/>
+                <a:ea typeface="Amiri" pitchFamily="2" charset="-78"/>
                 <a:cs typeface="Amiri" pitchFamily="2" charset="-78"/>
               </a:rPr>
               <a:t>م</a:t>
@@ -5463,6 +5498,7 @@
                   <a:srgbClr val="8A6D1E"/>
                 </a:solidFill>
                 <a:latin typeface="Amiri" pitchFamily="2" charset="-78"/>
+                <a:ea typeface="Amiri" pitchFamily="2" charset="-78"/>
                 <a:cs typeface="Amiri" pitchFamily="2" charset="-78"/>
               </a:rPr>
               <a:t>اخْتَرْ عُنْوَانًا وَاحِدًا</a:t>
@@ -5743,6 +5779,7 @@
                   <a:srgbClr val="1B3B6F"/>
                 </a:solidFill>
                 <a:latin typeface="Amiri" pitchFamily="2" charset="-78"/>
+                <a:ea typeface="Amiri" pitchFamily="2" charset="-78"/>
                 <a:cs typeface="Amiri" pitchFamily="2" charset="-78"/>
               </a:rPr>
               <a:t>عَادَاتِي فِي التَّسَوُّقِ</a:t>
@@ -5781,6 +5818,7 @@
                   <a:srgbClr val="1B3B6F"/>
                 </a:solidFill>
                 <a:latin typeface="Amiri" pitchFamily="2" charset="-78"/>
+                <a:ea typeface="Amiri" pitchFamily="2" charset="-78"/>
                 <a:cs typeface="Amiri" pitchFamily="2" charset="-78"/>
               </a:rPr>
               <a:t>(أ)</a:t>
@@ -5887,6 +5925,7 @@
                   <a:srgbClr val="1B3B6F"/>
                 </a:solidFill>
                 <a:latin typeface="Amiri" pitchFamily="2" charset="-78"/>
+                <a:ea typeface="Amiri" pitchFamily="2" charset="-78"/>
                 <a:cs typeface="Amiri" pitchFamily="2" charset="-78"/>
               </a:rPr>
               <a:t>أَيْنَ وَمَتَى تَتَسَوَّقُ · المَحَلُّ أَمِ الإِنْتَرْنِتُ؟ · تَجْرِبَةُ شِرَاءٍ لَا تَنْسَاهَا · رَأْيُكَ وَخِطَطُكَ</a:t>
@@ -6018,6 +6057,7 @@
                   <a:srgbClr val="1B3B6F"/>
                 </a:solidFill>
                 <a:latin typeface="Amiri" pitchFamily="2" charset="-78"/>
+                <a:ea typeface="Amiri" pitchFamily="2" charset="-78"/>
                 <a:cs typeface="Amiri" pitchFamily="2" charset="-78"/>
               </a:rPr>
               <a:t>نَشْتَرِي أَكْثَرَ مِمَّا نَحْتَاجُ</a:t>
@@ -6056,6 +6096,7 @@
                   <a:srgbClr val="1B3B6F"/>
                 </a:solidFill>
                 <a:latin typeface="Amiri" pitchFamily="2" charset="-78"/>
+                <a:ea typeface="Amiri" pitchFamily="2" charset="-78"/>
                 <a:cs typeface="Amiri" pitchFamily="2" charset="-78"/>
               </a:rPr>
               <a:t>(ب)</a:t>
@@ -6159,6 +6200,7 @@
                   <a:srgbClr val="1B3B6F"/>
                 </a:solidFill>
                 <a:latin typeface="Amiri" pitchFamily="2" charset="-78"/>
+                <a:ea typeface="Amiri" pitchFamily="2" charset="-78"/>
                 <a:cs typeface="Amiri" pitchFamily="2" charset="-78"/>
               </a:rPr>
               <a:t>ظَاهِرَةُ الاسْتِهْلَاكِ · المَاضِي وَالحَاضِرُ · مِثَالٌ مِنْ تَجْرِبَتِكَ · رَأْيُكَ وَنَصِيحَتُكَ</a:t>
@@ -6358,6 +6400,7 @@
                   <a:srgbClr val="D4AF37"/>
                 </a:solidFill>
                 <a:latin typeface="Amiri" pitchFamily="2" charset="-78"/>
+                <a:ea typeface="Amiri" pitchFamily="2" charset="-78"/>
                 <a:cs typeface="Amiri" pitchFamily="2" charset="-78"/>
               </a:rPr>
               <a:t>م</a:t>
@@ -6678,6 +6721,7 @@
                   <a:srgbClr val="8A6D1E"/>
                 </a:solidFill>
                 <a:latin typeface="Amiri" pitchFamily="2" charset="-78"/>
+                <a:ea typeface="Amiri" pitchFamily="2" charset="-78"/>
                 <a:cs typeface="Amiri" pitchFamily="2" charset="-78"/>
               </a:rPr>
               <a:t>خُطَّةُ الكِتَابَةِ</a:t>
@@ -7302,6 +7346,7 @@
                   <a:srgbClr val="1B3B6F"/>
                 </a:solidFill>
                 <a:latin typeface="Amiri" pitchFamily="2" charset="-78"/>
+                <a:ea typeface="Amiri" pitchFamily="2" charset="-78"/>
                 <a:cs typeface="Amiri" pitchFamily="2" charset="-78"/>
               </a:rPr>
               <a:t>الأَسْعَارُ عَلَى الإِنْتَرْنِتِ أَرْخَصُ أَحْيَانًا.</a:t>
@@ -7401,6 +7446,7 @@
                   <a:srgbClr val="1B3B6F"/>
                 </a:solidFill>
                 <a:latin typeface="Amiri" pitchFamily="2" charset="-78"/>
+                <a:ea typeface="Amiri" pitchFamily="2" charset="-78"/>
                 <a:cs typeface="Amiri" pitchFamily="2" charset="-78"/>
               </a:rPr>
               <a:t>كَانَ ثَمَنُهُ ثَمَانِينَ جُنَيْهًا، وَدَفَعْتُ أَرْبَعِينَ فَقَطْ.</a:t>
@@ -7500,6 +7546,7 @@
                   <a:srgbClr val="1B3B6F"/>
                 </a:solidFill>
                 <a:latin typeface="Amiri" pitchFamily="2" charset="-78"/>
+                <a:ea typeface="Amiri" pitchFamily="2" charset="-78"/>
                 <a:cs typeface="Amiri" pitchFamily="2" charset="-78"/>
               </a:rPr>
               <a:t>سَأَدَّخِرُ جُزْءًا مِنْ مَصْرُوفِي كُلَّ شَهْرٍ.</a:t>
@@ -7661,6 +7708,7 @@
                   <a:srgbClr val="1F2A37"/>
                 </a:solidFill>
                 <a:latin typeface="Amiri" pitchFamily="2" charset="-78"/>
+                <a:ea typeface="Amiri" pitchFamily="2" charset="-78"/>
                 <a:cs typeface="Amiri" pitchFamily="2" charset="-78"/>
               </a:rPr>
               <a:t>أ</a:t>
@@ -7687,6 +7735,7 @@
                   <a:srgbClr val="1F2A37"/>
                 </a:solidFill>
                 <a:latin typeface="Amiri" pitchFamily="2" charset="-78"/>
+                <a:ea typeface="Amiri" pitchFamily="2" charset="-78"/>
                 <a:cs typeface="Amiri" pitchFamily="2" charset="-78"/>
               </a:rPr>
               <a:t>ب</a:t>
@@ -7833,6 +7882,7 @@
                   <a:srgbClr val="D4AF37"/>
                 </a:solidFill>
                 <a:latin typeface="Amiri" pitchFamily="2" charset="-78"/>
+                <a:ea typeface="Amiri" pitchFamily="2" charset="-78"/>
                 <a:cs typeface="Amiri" pitchFamily="2" charset="-78"/>
               </a:rPr>
               <a:t>م</a:t>
@@ -8090,6 +8140,7 @@
                   <a:srgbClr val="8A6D1E"/>
                 </a:solidFill>
                 <a:latin typeface="Amiri" pitchFamily="2" charset="-78"/>
+                <a:ea typeface="Amiri" pitchFamily="2" charset="-78"/>
                 <a:cs typeface="Amiri" pitchFamily="2" charset="-78"/>
               </a:rPr>
               <a:t>أ</a:t>
@@ -8154,6 +8205,7 @@
                   <a:srgbClr val="1B3B6F"/>
                 </a:solidFill>
                 <a:latin typeface="Amiri" pitchFamily="2" charset="-78"/>
+                <a:ea typeface="Amiri" pitchFamily="2" charset="-78"/>
                 <a:cs typeface="Amiri" pitchFamily="2" charset="-78"/>
               </a:rPr>
               <a:t>أ</a:t>
@@ -8205,6 +8257,7 @@
                   <a:srgbClr val="8A6D1E"/>
                 </a:solidFill>
                 <a:latin typeface="Amiri" pitchFamily="2" charset="-78"/>
+                <a:ea typeface="Amiri" pitchFamily="2" charset="-78"/>
                 <a:cs typeface="Amiri" pitchFamily="2" charset="-78"/>
               </a:rPr>
               <a:t>نَمُوذَجُ الإِجَابَةِ</a:t>
@@ -8318,6 +8371,7 @@
                   <a:srgbClr val="1F2A37"/>
                 </a:solidFill>
                 <a:latin typeface="Amiri" pitchFamily="2" charset="-78"/>
+                <a:ea typeface="Amiri" pitchFamily="2" charset="-78"/>
                 <a:cs typeface="Amiri" pitchFamily="2" charset="-78"/>
               </a:rPr>
               <a:t>أُحِبُّ التَّسَوُّقَ كَثِيرًا، خُصُوصًا فِي نِهَايَةِ الأُسْبُوعِ. أَذْهَبُ مَعَ أُمِّي أَوْ أَصْدِقَائِي إِلَى المَرْكَزِ التِّجَارِيِّ الكَبِيرِ فِي مَدِينَتِنَا. هُنَاكَ مَحَلَّاتٌ كَثِيرَةٌ لِلْمَلَابِسِ وَالأَحْذِيَةِ وَالكُتُبِ، وَمَطَاعِمُ لَذِيذَةٌ أَيْضًا.</a:t>
@@ -8337,6 +8391,7 @@
                   <a:srgbClr val="1F2A37"/>
                 </a:solidFill>
                 <a:latin typeface="Amiri" pitchFamily="2" charset="-78"/>
+                <a:ea typeface="Amiri" pitchFamily="2" charset="-78"/>
                 <a:cs typeface="Amiri" pitchFamily="2" charset="-78"/>
               </a:rPr>
               <a:t>أَشْتَرِي أَيْضًا عَلَى الإِنْتَرْنِتِ، لِأَنَّ الأَسْعَارَ هُنَاكَ أَرْخَصُ أَحْيَانًا، وَالتَّوْصِيلُ سَرِيعٌ. لٰكِنِّي أُفَضِّلُ أَنْ أَشْتَرِيَ المَلَابِسَ مِنَ المَحَلِّ، لِأَنِّي أُرِيدُ أَنْ أُجَرِّبَ المَقَاسَ وَأَرَى اللَّوْنَ الحَقِيقِيَّ.</a:t>
@@ -8356,6 +8411,7 @@
                   <a:srgbClr val="1F2A37"/>
                 </a:solidFill>
                 <a:latin typeface="Amiri" pitchFamily="2" charset="-78"/>
+                <a:ea typeface="Amiri" pitchFamily="2" charset="-78"/>
                 <a:cs typeface="Amiri" pitchFamily="2" charset="-78"/>
               </a:rPr>
               <a:t>فِي الشَّهْرِ المَاضِي كَانَتْ هُنَاكَ تَخْفِيضَاتٌ كَبِيرَةٌ. اشْتَرَيْتُ مِعْطَفًا شَتْوِيًّا بِنِصْفِ الثَّمَنِ: كَانَ ثَمَنُهُ ثَمَانِينَ جُنَيْهًا، وَدَفَعْتُ أَرْبَعِينَ فَقَطْ! اشْتَرَيْتُ أَيْضًا هَدِيَّةً لِأُخْتِي، وَكَانَتْ سَعِيدَةً جِدًّا بِهَا. كَانَ يَوْمًا مُمْتِعًا وَمُفِيدًا.</a:t>
@@ -8375,6 +8431,7 @@
                   <a:srgbClr val="1F2A37"/>
                 </a:solidFill>
                 <a:latin typeface="Amiri" pitchFamily="2" charset="-78"/>
+                <a:ea typeface="Amiri" pitchFamily="2" charset="-78"/>
                 <a:cs typeface="Amiri" pitchFamily="2" charset="-78"/>
               </a:rPr>
               <a:t>فِي رَأْيِي، يَجِبُ أَنْ نُقَارِنَ الأَسْعَارَ قَبْلَ الشِّرَاءِ، وَأَلَّا نَشْتَرِيَ أَشْيَاءَ لَا نَحْتَاجُ إِلَيْهَا. فِي المُسْتَقْبَلِ سَأَدَّخِرُ جُزْءًا مِنْ مَصْرُوفِي كُلَّ شَهْرٍ، لِكَيْ أَشْتَرِيَ حَاسُوبًا جَدِيدًا لِلدِّرَاسَةِ.</a:t>
@@ -8538,11 +8595,12 @@
               <a:buNone/>
             </a:pPr>
             <a:r>
-              <a:rPr lang="en-US" sz="950" b="1" dirty="0">
+              <a:rPr lang="ar-SA" sz="950" b="1" dirty="0">
                 <a:solidFill>
                   <a:srgbClr val="FFFFFF"/>
                 </a:solidFill>
                 <a:latin typeface="Calibri" pitchFamily="34" charset="0"/>
+                <a:ea typeface="Amiri" pitchFamily="2" charset="-78"/>
                 <a:cs typeface="Amiri" pitchFamily="2" charset="-78"/>
               </a:rPr>
               <a:t>هُنَاكَ مَحَلَّاتٌ كَثِيرَةٌ</a:t>
@@ -8603,11 +8661,12 @@
               <a:buNone/>
             </a:pPr>
             <a:r>
-              <a:rPr lang="en-US" sz="950" b="1" dirty="0">
+              <a:rPr lang="ar-SA" sz="950" b="1" dirty="0">
                 <a:solidFill>
                   <a:srgbClr val="FFFFFF"/>
                 </a:solidFill>
                 <a:latin typeface="Calibri" pitchFamily="34" charset="0"/>
+                <a:ea typeface="Amiri" pitchFamily="2" charset="-78"/>
                 <a:cs typeface="Amiri" pitchFamily="2" charset="-78"/>
               </a:rPr>
               <a:t>الأَسْعَارَ هُنَاكَ أَرْخَصُ</a:t>
@@ -8668,11 +8727,12 @@
               <a:buNone/>
             </a:pPr>
             <a:r>
-              <a:rPr lang="en-US" sz="950" b="1" dirty="0">
+              <a:rPr lang="ar-SA" sz="950" b="1" dirty="0">
                 <a:solidFill>
                   <a:srgbClr val="FFFFFF"/>
                 </a:solidFill>
                 <a:latin typeface="Calibri" pitchFamily="34" charset="0"/>
+                <a:ea typeface="Amiri" pitchFamily="2" charset="-78"/>
                 <a:cs typeface="Amiri" pitchFamily="2" charset="-78"/>
               </a:rPr>
               <a:t>كَانَ ثَمَنُهُ ثَمَانِينَ</a:t>
@@ -8733,11 +8793,12 @@
               <a:buNone/>
             </a:pPr>
             <a:r>
-              <a:rPr lang="en-US" sz="950" b="1" dirty="0">
+              <a:rPr lang="ar-SA" sz="950" b="1" dirty="0">
                 <a:solidFill>
                   <a:srgbClr val="FFFFFF"/>
                 </a:solidFill>
                 <a:latin typeface="Calibri" pitchFamily="34" charset="0"/>
+                <a:ea typeface="Amiri" pitchFamily="2" charset="-78"/>
                 <a:cs typeface="Amiri" pitchFamily="2" charset="-78"/>
               </a:rPr>
               <a:t>لِكَيْ أَشْتَرِيَ</a:t>
@@ -8871,6 +8932,7 @@
                   <a:srgbClr val="D4AF37"/>
                 </a:solidFill>
                 <a:latin typeface="Amiri" pitchFamily="2" charset="-78"/>
+                <a:ea typeface="Amiri" pitchFamily="2" charset="-78"/>
                 <a:cs typeface="Amiri" pitchFamily="2" charset="-78"/>
               </a:rPr>
               <a:t>م</a:t>
@@ -9128,6 +9190,7 @@
                   <a:srgbClr val="8A6D1E"/>
                 </a:solidFill>
                 <a:latin typeface="Amiri" pitchFamily="2" charset="-78"/>
+                <a:ea typeface="Amiri" pitchFamily="2" charset="-78"/>
                 <a:cs typeface="Amiri" pitchFamily="2" charset="-78"/>
               </a:rPr>
               <a:t>أ</a:t>
@@ -9192,6 +9255,7 @@
                   <a:srgbClr val="1B3B6F"/>
                 </a:solidFill>
                 <a:latin typeface="Amiri" pitchFamily="2" charset="-78"/>
+                <a:ea typeface="Amiri" pitchFamily="2" charset="-78"/>
                 <a:cs typeface="Amiri" pitchFamily="2" charset="-78"/>
               </a:rPr>
               <a:t>أ</a:t>
@@ -9243,6 +9307,7 @@
                   <a:srgbClr val="8A6D1E"/>
                 </a:solidFill>
                 <a:latin typeface="Amiri" pitchFamily="2" charset="-78"/>
+                <a:ea typeface="Amiri" pitchFamily="2" charset="-78"/>
                 <a:cs typeface="Amiri" pitchFamily="2" charset="-78"/>
               </a:rPr>
               <a:t>نَمُوذَجُ الإِجَابَةِ</a:t>
@@ -9356,6 +9421,7 @@
                   <a:srgbClr val="1F2A37"/>
                 </a:solidFill>
                 <a:latin typeface="Amiri" pitchFamily="2" charset="-78"/>
+                <a:ea typeface="Amiri" pitchFamily="2" charset="-78"/>
                 <a:cs typeface="Amiri" pitchFamily="2" charset="-78"/>
               </a:rPr>
               <a:t>يَرَى بَعْضُ النَّاسِ أَنَّ التَّسَوُّقَ مُجَرَّدُ وَاجِبٍ مُمِلٍّ، أَمَّا أَنَا فَأَعْتَبِرُهُ فَنًّا يَحْتَاجُ إِلَى ذَكَاءٍ وَصَبْرٍ؛ فَقَبْلَ أَنْ أَشْتَرِيَ أَيَّ شَيْءٍ، أُقَارِنُ الأَسْعَارَ فِي ثَلَاثَةِ مَوَاقِعَ عَلَى الأَقَلِّ، وَأَقْرَأُ تَعْلِيقَاتِ المُشْتَرِينَ بِعِنَايَةٍ، ثُمَّ أَنْتَظِرُ يَوْمًا كَامِلًا لِأَتَأَكَّدَ أَنِّي أَحْتَاجُ إِلَيْهِ فِعْلًا.</a:t>
@@ -9375,6 +9441,7 @@
                   <a:srgbClr val="1F2A37"/>
                 </a:solidFill>
                 <a:latin typeface="Amiri" pitchFamily="2" charset="-78"/>
+                <a:ea typeface="Amiri" pitchFamily="2" charset="-78"/>
                 <a:cs typeface="Amiri" pitchFamily="2" charset="-78"/>
               </a:rPr>
               <a:t>وَمَعَ أَنَّ التَّسَوُّقَ عَلَى الإِنْتَرْنِتِ أَسْهَلُ وَأَرْخَصُ غَالِبًا، فَإِنِّي مَا زِلْتُ أُفَضِّلُ السُّوقَ الشَّعْبِيَّ فِي حَيِّنَا؛ إِذْ أَعْرِفُ البَائِعِينَ بِأَسْمَائِهِمْ، وَأَسْتَطِيعُ أَنْ أُفَاوِضَ عَلَى السِّعْرِ، وَهُوَ أَمْرٌ لَا يَسْمَحُ بِهِ أَيُّ مَوْقِعٍ.</a:t>
@@ -9394,6 +9461,7 @@
                   <a:srgbClr val="1F2A37"/>
                 </a:solidFill>
                 <a:latin typeface="Amiri" pitchFamily="2" charset="-78"/>
+                <a:ea typeface="Amiri" pitchFamily="2" charset="-78"/>
                 <a:cs typeface="Amiri" pitchFamily="2" charset="-78"/>
               </a:rPr>
               <a:t>وَقَدْ تَعَلَّمْتُ دَرْسًا مُهِمًّا فِي السَّنَةِ المَاضِيَةِ، عِنْدَمَا اشْتَرَيْتُ سَمَّاعَاتٍ رَخِيصَةً جِدًّا مِنْ مَوْقِعٍ مَجْهُولٍ؛ فَقَدْ تَعَطَّلَتْ بَعْدَ أُسْبُوعَيْنِ، وَلَمْ أَسْتَطِعْ إِرْجَاعَهَا، لِأَنَّ المَوْقِعَ اخْتَفَى! فَاضْطُرِرْتُ إِلَى شِرَاءِ سَمَّاعَاتٍ أُخْرَى، فَدَفَعْتُ الثَّمَنَ مَرَّتَيْنِ.</a:t>
@@ -9413,6 +9481,7 @@
                   <a:srgbClr val="1F2A37"/>
                 </a:solidFill>
                 <a:latin typeface="Amiri" pitchFamily="2" charset="-78"/>
+                <a:ea typeface="Amiri" pitchFamily="2" charset="-78"/>
                 <a:cs typeface="Amiri" pitchFamily="2" charset="-78"/>
               </a:rPr>
               <a:t>صَحِيحٌ أَنَّ الرَّخِيصَ يُغْرِينَا، غَيْرَ أَنَّ الجَوْدَةَ تُوَفِّرُ المَالَ عَلَى المَدَى البَعِيدِ. وَلَوْ فَكَّرَ كُلُّ مُسْتَهْلِكٍ قَبْلَ أَنْ يَضْغَطَ عَلَى زِرِّ الشِّرَاءِ، لَاشْتَرَيْنَا أَقَلَّ، وَلَعِشْنَا بِرَاحَةٍ أَكْبَرَ.</a:t>
@@ -9511,11 +9580,12 @@
               <a:buNone/>
             </a:pPr>
             <a:r>
-              <a:rPr lang="en-US" sz="950" b="1" dirty="0">
+              <a:rPr lang="ar-SA" sz="950" b="1" dirty="0">
                 <a:solidFill>
                   <a:srgbClr val="FFFFFF"/>
                 </a:solidFill>
                 <a:latin typeface="Calibri" pitchFamily="34" charset="0"/>
+                <a:ea typeface="Amiri" pitchFamily="2" charset="-78"/>
                 <a:cs typeface="Amiri" pitchFamily="2" charset="-78"/>
               </a:rPr>
               <a:t>أَمَّا أَنَا فَأَعْتَبِرُهُ</a:t>
@@ -9576,11 +9646,12 @@
               <a:buNone/>
             </a:pPr>
             <a:r>
-              <a:rPr lang="en-US" sz="950" b="1" dirty="0">
+              <a:rPr lang="ar-SA" sz="950" b="1" dirty="0">
                 <a:solidFill>
                   <a:srgbClr val="FFFFFF"/>
                 </a:solidFill>
                 <a:latin typeface="Calibri" pitchFamily="34" charset="0"/>
+                <a:ea typeface="Amiri" pitchFamily="2" charset="-78"/>
                 <a:cs typeface="Amiri" pitchFamily="2" charset="-78"/>
               </a:rPr>
               <a:t>مَعَ أَنَّ … فَإِنِّي</a:t>
@@ -9641,11 +9712,12 @@
               <a:buNone/>
             </a:pPr>
             <a:r>
-              <a:rPr lang="en-US" sz="950" b="1" dirty="0">
+              <a:rPr lang="ar-SA" sz="950" b="1" dirty="0">
                 <a:solidFill>
                   <a:srgbClr val="FFFFFF"/>
                 </a:solidFill>
                 <a:latin typeface="Calibri" pitchFamily="34" charset="0"/>
+                <a:ea typeface="Amiri" pitchFamily="2" charset="-78"/>
                 <a:cs typeface="Amiri" pitchFamily="2" charset="-78"/>
               </a:rPr>
               <a:t>لَا يَسْمَحُ بِهِ أَيُّ مَوْقِعٍ</a:t>
@@ -9706,11 +9778,12 @@
               <a:buNone/>
             </a:pPr>
             <a:r>
-              <a:rPr lang="en-US" sz="950" b="1" dirty="0">
+              <a:rPr lang="ar-SA" sz="950" b="1" dirty="0">
                 <a:solidFill>
                   <a:srgbClr val="FFFFFF"/>
                 </a:solidFill>
                 <a:latin typeface="Calibri" pitchFamily="34" charset="0"/>
+                <a:ea typeface="Amiri" pitchFamily="2" charset="-78"/>
                 <a:cs typeface="Amiri" pitchFamily="2" charset="-78"/>
               </a:rPr>
               <a:t>لَوْ فَكَّرَ … لَاشْتَرَيْنَا</a:t>
@@ -9844,6 +9917,7 @@
                   <a:srgbClr val="D4AF37"/>
                 </a:solidFill>
                 <a:latin typeface="Amiri" pitchFamily="2" charset="-78"/>
+                <a:ea typeface="Amiri" pitchFamily="2" charset="-78"/>
                 <a:cs typeface="Amiri" pitchFamily="2" charset="-78"/>
               </a:rPr>
               <a:t>م</a:t>
@@ -10101,6 +10175,7 @@
                   <a:srgbClr val="8A6D1E"/>
                 </a:solidFill>
                 <a:latin typeface="Amiri" pitchFamily="2" charset="-78"/>
+                <a:ea typeface="Amiri" pitchFamily="2" charset="-78"/>
                 <a:cs typeface="Amiri" pitchFamily="2" charset="-78"/>
               </a:rPr>
               <a:t>ب</a:t>
@@ -10165,6 +10240,7 @@
                   <a:srgbClr val="1B3B6F"/>
                 </a:solidFill>
                 <a:latin typeface="Amiri" pitchFamily="2" charset="-78"/>
+                <a:ea typeface="Amiri" pitchFamily="2" charset="-78"/>
                 <a:cs typeface="Amiri" pitchFamily="2" charset="-78"/>
               </a:rPr>
               <a:t>ب</a:t>
@@ -10216,6 +10292,7 @@
                   <a:srgbClr val="8A6D1E"/>
                 </a:solidFill>
                 <a:latin typeface="Amiri" pitchFamily="2" charset="-78"/>
+                <a:ea typeface="Amiri" pitchFamily="2" charset="-78"/>
                 <a:cs typeface="Amiri" pitchFamily="2" charset="-78"/>
               </a:rPr>
               <a:t>نَمُوذَجُ الإِجَابَةِ</a:t>
@@ -10329,6 +10406,7 @@
                   <a:srgbClr val="1F2A37"/>
                 </a:solidFill>
                 <a:latin typeface="Amiri" pitchFamily="2" charset="-78"/>
+                <a:ea typeface="Amiri" pitchFamily="2" charset="-78"/>
                 <a:cs typeface="Amiri" pitchFamily="2" charset="-78"/>
               </a:rPr>
               <a:t>تَمْتَلِئُ خَزَائِنُنَا بِمَلَابِسَ لَمْ نَلْبَسْهَا إِلَّا مَرَّةً أَوْ مَرَّتَيْنِ، وَمَعَ ذٰلِكَ نَشْتَرِي المَزِيدَ كُلَّ أُسْبُوعٍ. فَهَلْ أَصْبَحْنَا نَشْتَرِي لِأَنَّنَا نَحْتَاجُ، أَمْ لِأَنَّ الإِعْلَانَاتِ تُقْنِعُنَا بِأَنَّنَا نَحْتَاجُ؟</a:t>
@@ -10348,6 +10426,7 @@
                   <a:srgbClr val="1F2A37"/>
                 </a:solidFill>
                 <a:latin typeface="Amiri" pitchFamily="2" charset="-78"/>
+                <a:ea typeface="Amiri" pitchFamily="2" charset="-78"/>
                 <a:cs typeface="Amiri" pitchFamily="2" charset="-78"/>
               </a:rPr>
               <a:t>فِي المَاضِي كَانَتِ الأُسَرُ تَشْتَرِي مَلَابِسَ قَلِيلَةً ذَاتَ جَوْدَةٍ عَالِيَةٍ، وَتُصْلِحُهَا إِذَا تَمَزَّقَتْ، أَمَّا اليَوْمَ فَتُصْنَعُ المَلَابِسُ بِأَسْعَارٍ زَهِيدَةٍ، وَتُرْمَى بَعْدَ أَشْهُرٍ قَلِيلَةٍ، مِمَّا يُؤَدِّي إِلَى تَلَوُّثٍ هَائِلٍ وَإِلَى ظُرُوفِ عَمَلٍ قَاسِيَةٍ لِلْعُمَّالِ.</a:t>
@@ -10367,6 +10446,7 @@
                   <a:srgbClr val="1F2A37"/>
                 </a:solidFill>
                 <a:latin typeface="Amiri" pitchFamily="2" charset="-78"/>
+                <a:ea typeface="Amiri" pitchFamily="2" charset="-78"/>
                 <a:cs typeface="Amiri" pitchFamily="2" charset="-78"/>
               </a:rPr>
               <a:t>وَقَدْ أَدْرَكْتُ حَجْمَ المُشْكِلَةِ عِنْدَمَا شَارَكْتُ فِي حَمْلَةٍ لِجَمْعِ المَلَابِسِ المُسْتَعْمَلَةِ فِي مَدْرَسَتِي؛ فَقَدْ جَمَعْنَا مِنَ الطُّلَّابِ وَأُسَرِهِمْ فِي أُسْبُوعٍ وَاحِدٍ أَكْثَرَ مِنْ خَمْسِمِئَةِ قِطْعَةٍ، كَانَ كَثِيرٌ مِنْهَا جَدِيدًا لَمْ تُنْزَعْ عَنْهُ البِطَاقَةُ بَعْدُ! وَقَدْ تَبَرَّعْنَا بِهَا كُلِّهَا لِجَمْعِيَّةٍ خَيْرِيَّةٍ مَحَلِّيَّةٍ.</a:t>
@@ -10386,6 +10466,7 @@
                   <a:srgbClr val="1F2A37"/>
                 </a:solidFill>
                 <a:latin typeface="Amiri" pitchFamily="2" charset="-78"/>
+                <a:ea typeface="Amiri" pitchFamily="2" charset="-78"/>
                 <a:cs typeface="Amiri" pitchFamily="2" charset="-78"/>
               </a:rPr>
               <a:t>صَحِيحٌ أَنَّ لِكُلِّ شَخْصٍ الحَقَّ فِي أَنْ يَشْتَرِيَ مَا يُحِبُّ، غَيْرَ أَنَّ المُسْتَهْلِكَ الذَّكِيَّ يَسْأَلُ نَفْسَهُ قَبْلَ الشِّرَاءِ: هَلْ أَحْتَاجُ إِلَيْهِ حَقًّا؟ وَإِذَا اشْتَرَيْنَا أَقَلَّ وَاخْتَرْنَا أَفْضَلَ، فَسَنَحْمِي جُيُوبَنَا وَكَوْكَبَنَا مَعًا.</a:t>
@@ -10484,11 +10565,12 @@
               <a:buNone/>
             </a:pPr>
             <a:r>
-              <a:rPr lang="en-US" sz="950" b="1" dirty="0">
+              <a:rPr lang="ar-SA" sz="950" b="1" dirty="0">
                 <a:solidFill>
                   <a:srgbClr val="FFFFFF"/>
                 </a:solidFill>
                 <a:latin typeface="Calibri" pitchFamily="34" charset="0"/>
+                <a:ea typeface="Amiri" pitchFamily="2" charset="-78"/>
                 <a:cs typeface="Amiri" pitchFamily="2" charset="-78"/>
               </a:rPr>
               <a:t>لَمْ نَلْبَسْهَا إِلَّا</a:t>
@@ -10549,11 +10631,12 @@
               <a:buNone/>
             </a:pPr>
             <a:r>
-              <a:rPr lang="en-US" sz="950" b="1" dirty="0">
+              <a:rPr lang="ar-SA" sz="950" b="1" dirty="0">
                 <a:solidFill>
                   <a:srgbClr val="FFFFFF"/>
                 </a:solidFill>
                 <a:latin typeface="Calibri" pitchFamily="34" charset="0"/>
+                <a:ea typeface="Amiri" pitchFamily="2" charset="-78"/>
                 <a:cs typeface="Amiri" pitchFamily="2" charset="-78"/>
               </a:rPr>
               <a:t>أَمَّا اليَوْمَ فَتُصْنَعُ</a:t>
@@ -10614,11 +10697,12 @@
               <a:buNone/>
             </a:pPr>
             <a:r>
-              <a:rPr lang="en-US" sz="950" b="1" dirty="0">
+              <a:rPr lang="ar-SA" sz="950" b="1" dirty="0">
                 <a:solidFill>
                   <a:srgbClr val="FFFFFF"/>
                 </a:solidFill>
                 <a:latin typeface="Calibri" pitchFamily="34" charset="0"/>
+                <a:ea typeface="Amiri" pitchFamily="2" charset="-78"/>
                 <a:cs typeface="Amiri" pitchFamily="2" charset="-78"/>
               </a:rPr>
               <a:t>لَمْ تُنْزَعْ … بَعْدُ</a:t>
@@ -10679,11 +10763,12 @@
               <a:buNone/>
             </a:pPr>
             <a:r>
-              <a:rPr lang="en-US" sz="950" b="1" dirty="0">
+              <a:rPr lang="ar-SA" sz="950" b="1" dirty="0">
                 <a:solidFill>
                   <a:srgbClr val="FFFFFF"/>
                 </a:solidFill>
                 <a:latin typeface="Calibri" pitchFamily="34" charset="0"/>
+                <a:ea typeface="Amiri" pitchFamily="2" charset="-78"/>
                 <a:cs typeface="Amiri" pitchFamily="2" charset="-78"/>
               </a:rPr>
               <a:t>إِذَا اشْتَرَيْنَا … فَسَنَحْمِي</a:t>
@@ -10817,6 +10902,7 @@
                   <a:srgbClr val="D4AF37"/>
                 </a:solidFill>
                 <a:latin typeface="Amiri" pitchFamily="2" charset="-78"/>
+                <a:ea typeface="Amiri" pitchFamily="2" charset="-78"/>
                 <a:cs typeface="Amiri" pitchFamily="2" charset="-78"/>
               </a:rPr>
               <a:t>م</a:t>
@@ -11137,6 +11223,7 @@
                   <a:srgbClr val="8A6D1E"/>
                 </a:solidFill>
                 <a:latin typeface="Amiri" pitchFamily="2" charset="-78"/>
+                <a:ea typeface="Amiri" pitchFamily="2" charset="-78"/>
                 <a:cs typeface="Amiri" pitchFamily="2" charset="-78"/>
               </a:rPr>
               <a:t>قَيِّمْ عَمَلَكَ</a:t>
@@ -12381,6 +12468,7 @@
                   <a:srgbClr val="FFFFFF"/>
                 </a:solidFill>
                 <a:latin typeface="Amiri" pitchFamily="2" charset="-78"/>
+                <a:ea typeface="Amiri" pitchFamily="2" charset="-78"/>
                 <a:cs typeface="Amiri" pitchFamily="2" charset="-78"/>
               </a:rPr>
               <a:t>أَحْسَنْتُمْ! إِلَى اللِّقَاءِ</a:t>
@@ -12533,6 +12621,7 @@
                   <a:srgbClr val="D4AF37"/>
                 </a:solidFill>
                 <a:latin typeface="Amiri" pitchFamily="2" charset="-78"/>
+                <a:ea typeface="Amiri" pitchFamily="2" charset="-78"/>
                 <a:cs typeface="Amiri" pitchFamily="2" charset="-78"/>
               </a:rPr>
               <a:t>وَرْشَةُ التَّدْرِيبِ</a:t>
@@ -12666,6 +12755,7 @@
                   <a:srgbClr val="D4AF37"/>
                 </a:solidFill>
                 <a:latin typeface="Amiri" pitchFamily="2" charset="-78"/>
+                <a:ea typeface="Amiri" pitchFamily="2" charset="-78"/>
                 <a:cs typeface="Amiri" pitchFamily="2" charset="-78"/>
               </a:rPr>
               <a:t>م</a:t>
@@ -12986,6 +13076,7 @@
                   <a:srgbClr val="8A6D1E"/>
                 </a:solidFill>
                 <a:latin typeface="Amiri" pitchFamily="2" charset="-78"/>
+                <a:ea typeface="Amiri" pitchFamily="2" charset="-78"/>
                 <a:cs typeface="Amiri" pitchFamily="2" charset="-78"/>
               </a:rPr>
               <a:t>آدَابُ الصَّفِّ</a:t>
@@ -14517,6 +14608,7 @@
                   <a:srgbClr val="D4AF37"/>
                 </a:solidFill>
                 <a:latin typeface="Amiri" pitchFamily="2" charset="-78"/>
+                <a:ea typeface="Amiri" pitchFamily="2" charset="-78"/>
                 <a:cs typeface="Amiri" pitchFamily="2" charset="-78"/>
               </a:rPr>
               <a:t>م</a:t>
@@ -14837,6 +14929,7 @@
                   <a:srgbClr val="8A6D1E"/>
                 </a:solidFill>
                 <a:latin typeface="Amiri" pitchFamily="2" charset="-78"/>
+                <a:ea typeface="Amiri" pitchFamily="2" charset="-78"/>
                 <a:cs typeface="Amiri" pitchFamily="2" charset="-78"/>
               </a:rPr>
               <a:t>خَرِيطَةُ الوَرْشَةِ</a:t>
@@ -15151,6 +15244,7 @@
                   <a:srgbClr val="1B3B6F"/>
                 </a:solidFill>
                 <a:latin typeface="Amiri" pitchFamily="2" charset="-78"/>
+                <a:ea typeface="Amiri" pitchFamily="2" charset="-78"/>
                 <a:cs typeface="Amiri" pitchFamily="2" charset="-78"/>
               </a:rPr>
               <a:t>كَيْفَ</a:t>
@@ -15427,6 +15521,7 @@
                   <a:srgbClr val="1E6B52"/>
                 </a:solidFill>
                 <a:latin typeface="Amiri" pitchFamily="2" charset="-78"/>
+                <a:ea typeface="Amiri" pitchFamily="2" charset="-78"/>
                 <a:cs typeface="Amiri" pitchFamily="2" charset="-78"/>
               </a:rPr>
               <a:t>الاسْتِمَارَةُ</a:t>
@@ -15703,6 +15798,7 @@
                   <a:srgbClr val="1E6B52"/>
                 </a:solidFill>
                 <a:latin typeface="Amiri" pitchFamily="2" charset="-78"/>
+                <a:ea typeface="Amiri" pitchFamily="2" charset="-78"/>
                 <a:cs typeface="Amiri" pitchFamily="2" charset="-78"/>
               </a:rPr>
               <a:t>الرِّسَالَةُ</a:t>
@@ -15979,6 +16075,7 @@
                   <a:srgbClr val="1E6B52"/>
                 </a:solidFill>
                 <a:latin typeface="Amiri" pitchFamily="2" charset="-78"/>
+                <a:ea typeface="Amiri" pitchFamily="2" charset="-78"/>
                 <a:cs typeface="Amiri" pitchFamily="2" charset="-78"/>
               </a:rPr>
               <a:t>المَقَالُ</a:t>
@@ -16255,6 +16352,7 @@
                   <a:srgbClr val="8A6D1E"/>
                 </a:solidFill>
                 <a:latin typeface="Amiri" pitchFamily="2" charset="-78"/>
+                <a:ea typeface="Amiri" pitchFamily="2" charset="-78"/>
                 <a:cs typeface="Amiri" pitchFamily="2" charset="-78"/>
               </a:rPr>
               <a:t>قَيِّمْ</a:t>
@@ -16498,6 +16596,7 @@
                   <a:srgbClr val="D4AF37"/>
                 </a:solidFill>
                 <a:latin typeface="Amiri" pitchFamily="2" charset="-78"/>
+                <a:ea typeface="Amiri" pitchFamily="2" charset="-78"/>
                 <a:cs typeface="Amiri" pitchFamily="2" charset="-78"/>
               </a:rPr>
               <a:t>م</a:t>
@@ -16818,6 +16917,7 @@
                   <a:srgbClr val="8A6D1E"/>
                 </a:solidFill>
                 <a:latin typeface="Amiri" pitchFamily="2" charset="-78"/>
+                <a:ea typeface="Amiri" pitchFamily="2" charset="-78"/>
                 <a:cs typeface="Amiri" pitchFamily="2" charset="-78"/>
               </a:rPr>
               <a:t>امْتِحَانُ الكِتَابَةِ</a:t>
@@ -17442,6 +17542,7 @@
                   <a:srgbClr val="1B3B6F"/>
                 </a:solidFill>
                 <a:latin typeface="Amiri" pitchFamily="2" charset="-78"/>
+                <a:ea typeface="Amiri" pitchFamily="2" charset="-78"/>
                 <a:cs typeface="Amiri" pitchFamily="2" charset="-78"/>
               </a:rPr>
               <a:t>كَانَ ثَمَنُهَا أَرْبَعِينَ جُنَيْهًا</a:t>
@@ -17541,6 +17642,7 @@
                   <a:srgbClr val="1B3B6F"/>
                 </a:solidFill>
                 <a:latin typeface="Amiri" pitchFamily="2" charset="-78"/>
+                <a:ea typeface="Amiri" pitchFamily="2" charset="-78"/>
                 <a:cs typeface="Amiri" pitchFamily="2" charset="-78"/>
               </a:rPr>
               <a:t>التَّسَوُّقُ عَلَى الإِنْتَرْنِتِ أَسْهَلُ وَأَرْخَصُ</a:t>
@@ -17640,6 +17742,7 @@
                   <a:srgbClr val="1B3B6F"/>
                 </a:solidFill>
                 <a:latin typeface="Amiri" pitchFamily="2" charset="-78"/>
+                <a:ea typeface="Amiri" pitchFamily="2" charset="-78"/>
                 <a:cs typeface="Amiri" pitchFamily="2" charset="-78"/>
               </a:rPr>
               <a:t>أُرِيدُ أَنْ أُبَدِّلَهَا أَوْ أَنْ أَسْتَرِدَّ ثَمَنَهَا</a:t>
@@ -17811,6 +17914,7 @@
                   <a:srgbClr val="D4AF37"/>
                 </a:solidFill>
                 <a:latin typeface="Amiri" pitchFamily="2" charset="-78"/>
+                <a:ea typeface="Amiri" pitchFamily="2" charset="-78"/>
                 <a:cs typeface="Amiri" pitchFamily="2" charset="-78"/>
               </a:rPr>
               <a:t>م</a:t>
@@ -18131,6 +18235,7 @@
                   <a:srgbClr val="8A6D1E"/>
                 </a:solidFill>
                 <a:latin typeface="Amiri" pitchFamily="2" charset="-78"/>
+                <a:ea typeface="Amiri" pitchFamily="2" charset="-78"/>
                 <a:cs typeface="Amiri" pitchFamily="2" charset="-78"/>
               </a:rPr>
               <a:t>اسْتِمَارَةُ إِرْجَاعِ المُشْتَرَيَاتِ</a:t>
@@ -18487,6 +18592,7 @@
                   <a:srgbClr val="1B3B6F"/>
                 </a:solidFill>
                 <a:latin typeface="Amiri" pitchFamily="2" charset="-78"/>
+                <a:ea typeface="Amiri" pitchFamily="2" charset="-78"/>
                 <a:cs typeface="Amiri" pitchFamily="2" charset="-78"/>
               </a:rPr>
               <a:t>الاسْمُ</a:t>
@@ -18731,6 +18837,7 @@
                   <a:srgbClr val="1B3B6F"/>
                 </a:solidFill>
                 <a:latin typeface="Amiri" pitchFamily="2" charset="-78"/>
+                <a:ea typeface="Amiri" pitchFamily="2" charset="-78"/>
                 <a:cs typeface="Amiri" pitchFamily="2" charset="-78"/>
               </a:rPr>
               <a:t>رَقْمُ الطَّلَبِ</a:t>
@@ -18975,6 +19082,7 @@
                   <a:srgbClr val="1B3B6F"/>
                 </a:solidFill>
                 <a:latin typeface="Amiri" pitchFamily="2" charset="-78"/>
+                <a:ea typeface="Amiri" pitchFamily="2" charset="-78"/>
                 <a:cs typeface="Amiri" pitchFamily="2" charset="-78"/>
               </a:rPr>
               <a:t>المُنْتَجُ</a:t>
@@ -19219,6 +19327,7 @@
                   <a:srgbClr val="1B3B6F"/>
                 </a:solidFill>
                 <a:latin typeface="Amiri" pitchFamily="2" charset="-78"/>
+                <a:ea typeface="Amiri" pitchFamily="2" charset="-78"/>
                 <a:cs typeface="Amiri" pitchFamily="2" charset="-78"/>
               </a:rPr>
               <a:t>الثَّمَنُ</a:t>
@@ -19463,6 +19572,7 @@
                   <a:srgbClr val="1B3B6F"/>
                 </a:solidFill>
                 <a:latin typeface="Amiri" pitchFamily="2" charset="-78"/>
+                <a:ea typeface="Amiri" pitchFamily="2" charset="-78"/>
                 <a:cs typeface="Amiri" pitchFamily="2" charset="-78"/>
               </a:rPr>
               <a:t>تَارِيخُ الشِّرَاءِ</a:t>
@@ -19707,6 +19817,7 @@
                   <a:srgbClr val="1B3B6F"/>
                 </a:solidFill>
                 <a:latin typeface="Amiri" pitchFamily="2" charset="-78"/>
+                <a:ea typeface="Amiri" pitchFamily="2" charset="-78"/>
                 <a:cs typeface="Amiri" pitchFamily="2" charset="-78"/>
               </a:rPr>
               <a:t>سَبَبُ الإِرْجَاعِ</a:t>
@@ -19951,6 +20062,7 @@
                   <a:srgbClr val="1B3B6F"/>
                 </a:solidFill>
                 <a:latin typeface="Amiri" pitchFamily="2" charset="-78"/>
+                <a:ea typeface="Amiri" pitchFamily="2" charset="-78"/>
                 <a:cs typeface="Amiri" pitchFamily="2" charset="-78"/>
               </a:rPr>
               <a:t>مَاذَا تُرِيدُ؟ (تَبْدِيلٌ / اسْتِرْدَادٌ)</a:t>
@@ -20130,6 +20242,7 @@
                   <a:srgbClr val="1B3B6F"/>
                 </a:solidFill>
                 <a:latin typeface="Amiri" pitchFamily="2" charset="-78"/>
+                <a:ea typeface="Amiri" pitchFamily="2" charset="-78"/>
                 <a:cs typeface="Amiri" pitchFamily="2" charset="-78"/>
               </a:rPr>
               <a:t>جُمْلَةٌ: صِفِ المُشْكِلَةَ</a:t>
@@ -20339,6 +20452,7 @@
                   <a:srgbClr val="D4AF37"/>
                 </a:solidFill>
                 <a:latin typeface="Amiri" pitchFamily="2" charset="-78"/>
+                <a:ea typeface="Amiri" pitchFamily="2" charset="-78"/>
                 <a:cs typeface="Amiri" pitchFamily="2" charset="-78"/>
               </a:rPr>
               <a:t>م</a:t>
@@ -20659,6 +20773,7 @@
                   <a:srgbClr val="8A6D1E"/>
                 </a:solidFill>
                 <a:latin typeface="Amiri" pitchFamily="2" charset="-78"/>
+                <a:ea typeface="Amiri" pitchFamily="2" charset="-78"/>
                 <a:cs typeface="Amiri" pitchFamily="2" charset="-78"/>
               </a:rPr>
               <a:t>نَمُوذَجُ الإِجَابَةِ</a:t>
@@ -20977,6 +21092,7 @@
                   <a:srgbClr val="1B3B6F"/>
                 </a:solidFill>
                 <a:latin typeface="Amiri" pitchFamily="2" charset="-78"/>
+                <a:ea typeface="Amiri" pitchFamily="2" charset="-78"/>
                 <a:cs typeface="Amiri" pitchFamily="2" charset="-78"/>
               </a:rPr>
               <a:t>رِيمُ حَسَنٌ</a:t>
@@ -21015,6 +21131,7 @@
                   <a:srgbClr val="1B3B6F"/>
                 </a:solidFill>
                 <a:latin typeface="Amiri" pitchFamily="2" charset="-78"/>
+                <a:ea typeface="Amiri" pitchFamily="2" charset="-78"/>
                 <a:cs typeface="Amiri" pitchFamily="2" charset="-78"/>
               </a:rPr>
               <a:t>الاسْمُ</a:t>
@@ -21156,6 +21273,7 @@
                   <a:srgbClr val="1B3B6F"/>
                 </a:solidFill>
                 <a:latin typeface="Amiri" pitchFamily="2" charset="-78"/>
+                <a:ea typeface="Amiri" pitchFamily="2" charset="-78"/>
                 <a:cs typeface="Amiri" pitchFamily="2" charset="-78"/>
               </a:rPr>
               <a:t>٤٥٢٧</a:t>
@@ -21194,6 +21312,7 @@
                   <a:srgbClr val="1B3B6F"/>
                 </a:solidFill>
                 <a:latin typeface="Amiri" pitchFamily="2" charset="-78"/>
+                <a:ea typeface="Amiri" pitchFamily="2" charset="-78"/>
                 <a:cs typeface="Amiri" pitchFamily="2" charset="-78"/>
               </a:rPr>
               <a:t>رَقْمُ الطَّلَبِ</a:t>
@@ -21335,6 +21454,7 @@
                   <a:srgbClr val="1B3B6F"/>
                 </a:solidFill>
                 <a:latin typeface="Amiri" pitchFamily="2" charset="-78"/>
+                <a:ea typeface="Amiri" pitchFamily="2" charset="-78"/>
                 <a:cs typeface="Amiri" pitchFamily="2" charset="-78"/>
               </a:rPr>
               <a:t>حَقِيبَةٌ مَدْرَسِيَّةٌ سَوْدَاءُ</a:t>
@@ -21373,6 +21493,7 @@
                   <a:srgbClr val="1B3B6F"/>
                 </a:solidFill>
                 <a:latin typeface="Amiri" pitchFamily="2" charset="-78"/>
+                <a:ea typeface="Amiri" pitchFamily="2" charset="-78"/>
                 <a:cs typeface="Amiri" pitchFamily="2" charset="-78"/>
               </a:rPr>
               <a:t>المُنْتَجُ</a:t>
@@ -21514,6 +21635,7 @@
                   <a:srgbClr val="1B3B6F"/>
                 </a:solidFill>
                 <a:latin typeface="Amiri" pitchFamily="2" charset="-78"/>
+                <a:ea typeface="Amiri" pitchFamily="2" charset="-78"/>
                 <a:cs typeface="Amiri" pitchFamily="2" charset="-78"/>
               </a:rPr>
               <a:t>أَرْبَعُونَ جُنَيْهًا</a:t>
@@ -21552,6 +21674,7 @@
                   <a:srgbClr val="1B3B6F"/>
                 </a:solidFill>
                 <a:latin typeface="Amiri" pitchFamily="2" charset="-78"/>
+                <a:ea typeface="Amiri" pitchFamily="2" charset="-78"/>
                 <a:cs typeface="Amiri" pitchFamily="2" charset="-78"/>
               </a:rPr>
               <a:t>الثَّمَنُ</a:t>
@@ -21693,6 +21816,7 @@
                   <a:srgbClr val="1B3B6F"/>
                 </a:solidFill>
                 <a:latin typeface="Amiri" pitchFamily="2" charset="-78"/>
+                <a:ea typeface="Amiri" pitchFamily="2" charset="-78"/>
                 <a:cs typeface="Amiri" pitchFamily="2" charset="-78"/>
               </a:rPr>
               <a:t>٢ سِبْتَمْبَر</a:t>
@@ -21731,6 +21855,7 @@
                   <a:srgbClr val="1B3B6F"/>
                 </a:solidFill>
                 <a:latin typeface="Amiri" pitchFamily="2" charset="-78"/>
+                <a:ea typeface="Amiri" pitchFamily="2" charset="-78"/>
                 <a:cs typeface="Amiri" pitchFamily="2" charset="-78"/>
               </a:rPr>
               <a:t>تَارِيخُ الشِّرَاءِ</a:t>
@@ -21872,6 +21997,7 @@
                   <a:srgbClr val="1B3B6F"/>
                 </a:solidFill>
                 <a:latin typeface="Amiri" pitchFamily="2" charset="-78"/>
+                <a:ea typeface="Amiri" pitchFamily="2" charset="-78"/>
                 <a:cs typeface="Amiri" pitchFamily="2" charset="-78"/>
               </a:rPr>
               <a:t>السَّحَّابُ مَكْسُورٌ</a:t>
@@ -21910,6 +22036,7 @@
                   <a:srgbClr val="1B3B6F"/>
                 </a:solidFill>
                 <a:latin typeface="Amiri" pitchFamily="2" charset="-78"/>
+                <a:ea typeface="Amiri" pitchFamily="2" charset="-78"/>
                 <a:cs typeface="Amiri" pitchFamily="2" charset="-78"/>
               </a:rPr>
               <a:t>سَبَبُ الإِرْجَاعِ</a:t>
@@ -22051,6 +22178,7 @@
                   <a:srgbClr val="1B3B6F"/>
                 </a:solidFill>
                 <a:latin typeface="Amiri" pitchFamily="2" charset="-78"/>
+                <a:ea typeface="Amiri" pitchFamily="2" charset="-78"/>
                 <a:cs typeface="Amiri" pitchFamily="2" charset="-78"/>
               </a:rPr>
               <a:t>تَبْدِيلٌ بِحَقِيبَةٍ جَدِيدَةٍ</a:t>
@@ -22089,6 +22217,7 @@
                   <a:srgbClr val="1B3B6F"/>
                 </a:solidFill>
                 <a:latin typeface="Amiri" pitchFamily="2" charset="-78"/>
+                <a:ea typeface="Amiri" pitchFamily="2" charset="-78"/>
                 <a:cs typeface="Amiri" pitchFamily="2" charset="-78"/>
               </a:rPr>
               <a:t>مَاذَا تُرِيدُ؟ (تَبْدِيلٌ / اسْتِرْدَادٌ)</a:t>
@@ -22230,6 +22359,7 @@
                   <a:srgbClr val="1B3B6F"/>
                 </a:solidFill>
                 <a:latin typeface="Amiri" pitchFamily="2" charset="-78"/>
+                <a:ea typeface="Amiri" pitchFamily="2" charset="-78"/>
                 <a:cs typeface="Amiri" pitchFamily="2" charset="-78"/>
               </a:rPr>
               <a:t>وَصَلَتِ الحَقِيبَةُ الَّتِي طَلَبْتُهَا رَمَادِيَّةً لَا سَوْدَاءَ، وَسَحَّابُهَا لَا يُغْلَقُ.</a:t>
@@ -22268,6 +22398,7 @@
                   <a:srgbClr val="1B3B6F"/>
                 </a:solidFill>
                 <a:latin typeface="Amiri" pitchFamily="2" charset="-78"/>
+                <a:ea typeface="Amiri" pitchFamily="2" charset="-78"/>
                 <a:cs typeface="Amiri" pitchFamily="2" charset="-78"/>
               </a:rPr>
               <a:t>جُمْلَةٌ: صِفِ المُشْكِلَةَ</a:t>
@@ -22477,6 +22608,7 @@
                   <a:srgbClr val="D4AF37"/>
                 </a:solidFill>
                 <a:latin typeface="Amiri" pitchFamily="2" charset="-78"/>
+                <a:ea typeface="Amiri" pitchFamily="2" charset="-78"/>
                 <a:cs typeface="Amiri" pitchFamily="2" charset="-78"/>
               </a:rPr>
               <a:t>م</a:t>
@@ -22797,6 +22929,7 @@
                   <a:srgbClr val="8A6D1E"/>
                 </a:solidFill>
                 <a:latin typeface="Amiri" pitchFamily="2" charset="-78"/>
+                <a:ea typeface="Amiri" pitchFamily="2" charset="-78"/>
                 <a:cs typeface="Amiri" pitchFamily="2" charset="-78"/>
               </a:rPr>
               <a:t>رِسَالَةُ شَكْوَى</a:t>
@@ -23272,6 +23405,7 @@
                   <a:srgbClr val="1B3B6F"/>
                 </a:solidFill>
                 <a:latin typeface="Amiri" pitchFamily="2" charset="-78"/>
+                <a:ea typeface="Amiri" pitchFamily="2" charset="-78"/>
                 <a:cs typeface="Amiri" pitchFamily="2" charset="-78"/>
               </a:rPr>
               <a:t>اشْتَرَيْتُ مِنْ مَوْقِعِكُمْ … وَكَانَ ثَمَنُهَا …</a:t>
@@ -23348,6 +23482,7 @@
                   <a:srgbClr val="1B3B6F"/>
                 </a:solidFill>
                 <a:latin typeface="Amiri" pitchFamily="2" charset="-78"/>
+                <a:ea typeface="Amiri" pitchFamily="2" charset="-78"/>
                 <a:cs typeface="Amiri" pitchFamily="2" charset="-78"/>
               </a:rPr>
               <a:t>لٰكِنَّ … مَكْسُورٌ / لَا يَعْمَلُ</a:t>
@@ -23424,6 +23559,7 @@
                   <a:srgbClr val="1B3B6F"/>
                 </a:solidFill>
                 <a:latin typeface="Amiri" pitchFamily="2" charset="-78"/>
+                <a:ea typeface="Amiri" pitchFamily="2" charset="-78"/>
                 <a:cs typeface="Amiri" pitchFamily="2" charset="-78"/>
               </a:rPr>
               <a:t>أَنَا حَزِينَةٌ، لِأَنِّي أَحْتَاجُ إِلَيْهَا …</a:t>
@@ -23500,6 +23636,7 @@
                   <a:srgbClr val="1B3B6F"/>
                 </a:solidFill>
                 <a:latin typeface="Amiri" pitchFamily="2" charset="-78"/>
+                <a:ea typeface="Amiri" pitchFamily="2" charset="-78"/>
                 <a:cs typeface="Amiri" pitchFamily="2" charset="-78"/>
               </a:rPr>
               <a:t>أُرِيدُ أَنْ أُبَدِّلَهَا / أَنْ أَسْتَرِدَّ ثَمَنَهَا</a:t>
@@ -23671,6 +23808,7 @@
                   <a:srgbClr val="D4AF37"/>
                 </a:solidFill>
                 <a:latin typeface="Amiri" pitchFamily="2" charset="-78"/>
+                <a:ea typeface="Amiri" pitchFamily="2" charset="-78"/>
                 <a:cs typeface="Amiri" pitchFamily="2" charset="-78"/>
               </a:rPr>
               <a:t>م</a:t>
@@ -23991,6 +24129,7 @@
                   <a:srgbClr val="8A6D1E"/>
                 </a:solidFill>
                 <a:latin typeface="Amiri" pitchFamily="2" charset="-78"/>
+                <a:ea typeface="Amiri" pitchFamily="2" charset="-78"/>
                 <a:cs typeface="Amiri" pitchFamily="2" charset="-78"/>
               </a:rPr>
               <a:t>نَصُّ السُّؤَالِ</a:t>
@@ -24271,6 +24410,7 @@
                   <a:srgbClr val="1B3B6F"/>
                 </a:solidFill>
                 <a:latin typeface="Amiri" pitchFamily="2" charset="-78"/>
+                <a:ea typeface="Amiri" pitchFamily="2" charset="-78"/>
                 <a:cs typeface="Amiri" pitchFamily="2" charset="-78"/>
               </a:rPr>
               <a:t>اشْتَرَيْتِ شَيْئًا عَلَى الإِنْتَرْنِتِ، وَهُنَاكَ مُشْكِلَةٌ. اكْتُبِي رِسَالَةً إِلَى الشَّرِكَةِ (٨٠–٩٠ كَلِمَةً).</a:t>
@@ -24412,6 +24552,7 @@
                   <a:srgbClr val="1B3B6F"/>
                 </a:solidFill>
                 <a:latin typeface="Amiri" pitchFamily="2" charset="-78"/>
+                <a:ea typeface="Amiri" pitchFamily="2" charset="-78"/>
                 <a:cs typeface="Amiri" pitchFamily="2" charset="-78"/>
               </a:rPr>
               <a:t>مَاذَا اشْتَرَيْتِ؟ وَمَتَى؟ وَكَمْ كَانَ ثَمَنُهُ؟</a:t>
@@ -24553,6 +24694,7 @@
                   <a:srgbClr val="1B3B6F"/>
                 </a:solidFill>
                 <a:latin typeface="Amiri" pitchFamily="2" charset="-78"/>
+                <a:ea typeface="Amiri" pitchFamily="2" charset="-78"/>
                 <a:cs typeface="Amiri" pitchFamily="2" charset="-78"/>
               </a:rPr>
               <a:t>مَا المُشْكِلَةُ؟</a:t>
@@ -24694,6 +24836,7 @@
                   <a:srgbClr val="1B3B6F"/>
                 </a:solidFill>
                 <a:latin typeface="Amiri" pitchFamily="2" charset="-78"/>
+                <a:ea typeface="Amiri" pitchFamily="2" charset="-78"/>
                 <a:cs typeface="Amiri" pitchFamily="2" charset="-78"/>
               </a:rPr>
               <a:t>كَيْفَ تَشْعُرِينَ؟ وَلِمَاذَا تَحْتَاجِينَ إِلَيْهِ؟</a:t>
@@ -24835,6 +24978,7 @@
                   <a:srgbClr val="1B3B6F"/>
                 </a:solidFill>
                 <a:latin typeface="Amiri" pitchFamily="2" charset="-78"/>
+                <a:ea typeface="Amiri" pitchFamily="2" charset="-78"/>
                 <a:cs typeface="Amiri" pitchFamily="2" charset="-78"/>
               </a:rPr>
               <a:t>مَاذَا تُرِيدِينَ أَنْ تَفْعَلَ الشَّرِكَةُ؟</a:t>
@@ -25044,6 +25188,7 @@
                   <a:srgbClr val="D4AF37"/>
                 </a:solidFill>
                 <a:latin typeface="Amiri" pitchFamily="2" charset="-78"/>
+                <a:ea typeface="Amiri" pitchFamily="2" charset="-78"/>
                 <a:cs typeface="Amiri" pitchFamily="2" charset="-78"/>
               </a:rPr>
               <a:t>م</a:t>
@@ -25364,6 +25509,7 @@
                   <a:srgbClr val="8A6D1E"/>
                 </a:solidFill>
                 <a:latin typeface="Amiri" pitchFamily="2" charset="-78"/>
+                <a:ea typeface="Amiri" pitchFamily="2" charset="-78"/>
                 <a:cs typeface="Amiri" pitchFamily="2" charset="-78"/>
               </a:rPr>
               <a:t>قَوَالِبُ الكِتَابَةِ</a:t>
@@ -25644,6 +25790,7 @@
                   <a:srgbClr val="1B3B6F"/>
                 </a:solidFill>
                 <a:latin typeface="Amiri" pitchFamily="2" charset="-78"/>
+                <a:ea typeface="Amiri" pitchFamily="2" charset="-78"/>
                 <a:cs typeface="Amiri" pitchFamily="2" charset="-78"/>
               </a:rPr>
               <a:t>إِلَى قِسْمِ خِدْمَةِ العُمَلَاءِ،</a:t>
@@ -25850,6 +25997,7 @@
                   <a:srgbClr val="1B3B6F"/>
                 </a:solidFill>
                 <a:latin typeface="Amiri" pitchFamily="2" charset="-78"/>
+                <a:ea typeface="Amiri" pitchFamily="2" charset="-78"/>
                 <a:cs typeface="Amiri" pitchFamily="2" charset="-78"/>
               </a:rPr>
               <a:t>فِي الأُسْبُوعِ المَاضِي اشْتَرَيْتُ ______ ، وَكَانَ ثَمَنُهَا ______ .</a:t>
@@ -26056,6 +26204,7 @@
                   <a:srgbClr val="1B3B6F"/>
                 </a:solidFill>
                 <a:latin typeface="Amiri" pitchFamily="2" charset="-78"/>
+                <a:ea typeface="Amiri" pitchFamily="2" charset="-78"/>
                 <a:cs typeface="Amiri" pitchFamily="2" charset="-78"/>
               </a:rPr>
               <a:t>وَصَلَتْ أَمْسِ، لٰكِنَّ ______ .</a:t>
@@ -26262,6 +26411,7 @@
                   <a:srgbClr val="1B3B6F"/>
                 </a:solidFill>
                 <a:latin typeface="Amiri" pitchFamily="2" charset="-78"/>
+                <a:ea typeface="Amiri" pitchFamily="2" charset="-78"/>
                 <a:cs typeface="Amiri" pitchFamily="2" charset="-78"/>
               </a:rPr>
               <a:t>أَنَا حَزِينَةٌ، لِأَنِّي أَحْتَاجُ إِلَيْهَا ______ .</a:t>
@@ -26468,6 +26618,7 @@
                   <a:srgbClr val="1B3B6F"/>
                 </a:solidFill>
                 <a:latin typeface="Amiri" pitchFamily="2" charset="-78"/>
+                <a:ea typeface="Amiri" pitchFamily="2" charset="-78"/>
                 <a:cs typeface="Amiri" pitchFamily="2" charset="-78"/>
               </a:rPr>
               <a:t>أُرِيدُ أَنْ ______ . سَأُرْسِلُ لَكُمْ ______ .</a:t>
@@ -26674,6 +26825,7 @@
                   <a:srgbClr val="1B3B6F"/>
                 </a:solidFill>
                 <a:latin typeface="Amiri" pitchFamily="2" charset="-78"/>
+                <a:ea typeface="Amiri" pitchFamily="2" charset="-78"/>
                 <a:cs typeface="Amiri" pitchFamily="2" charset="-78"/>
               </a:rPr>
               <a:t>مَعَ الشُّكْرِ، ______</a:t>
@@ -26913,13 +27065,9 @@
     <a:fontScheme name="Office">
       <a:majorFont>
         <a:latin typeface="Calibri Light" panose="020F0302020204030204"/>
-        <a:ea typeface=""/>
-        <a:cs typeface=""/>
-        <a:font script="Jpan" typeface="游ゴシック Light"/>
-        <a:font script="Hang" typeface="맑은 고딕"/>
-        <a:font script="Hans" typeface="等线 Light"/>
-        <a:font script="Hant" typeface="新細明體"/>
-        <a:font script="Arab" typeface="Times New Roman"/>
+        <a:ea typeface="Amiri" pitchFamily="2" charset="-78"/>
+        <a:cs typeface="Amiri" pitchFamily="2" charset="-78"/>
+        <a:font script="Arab" typeface="Amiri"/>
         <a:font script="Hebr" typeface="Times New Roman"/>
         <a:font script="Thai" typeface="Angsana New"/>
         <a:font script="Ethi" typeface="Nyala"/>
@@ -26965,13 +27113,9 @@
       </a:majorFont>
       <a:minorFont>
         <a:latin typeface="Calibri" panose="020F0502020204030204"/>
-        <a:ea typeface=""/>
-        <a:cs typeface=""/>
-        <a:font script="Jpan" typeface="游ゴシック"/>
-        <a:font script="Hang" typeface="맑은 고딕"/>
-        <a:font script="Hans" typeface="等线"/>
-        <a:font script="Hant" typeface="新細明體"/>
-        <a:font script="Arab" typeface="Arial"/>
+        <a:ea typeface="Amiri" pitchFamily="2" charset="-78"/>
+        <a:cs typeface="Amiri" pitchFamily="2" charset="-78"/>
+        <a:font script="Arab" typeface="Amiri"/>
         <a:font script="Hebr" typeface="Arial"/>
         <a:font script="Thai" typeface="Cordia New"/>
         <a:font script="Ethi" typeface="Nyala"/>

--- a/Topic_C/Exam_Practice/TC-L09_Writing_Workshop_Shopping_Prices_Consumer_Choices.pptx
+++ b/Topic_C/Exam_Practice/TC-L09_Writing_Workshop_Shopping_Prices_Consumer_Choices.pptx
@@ -3848,7 +3848,7 @@
                 <a:solidFill>
                   <a:srgbClr val="FFFFFF"/>
                 </a:solidFill>
-                <a:latin typeface="Calibri" pitchFamily="34" charset="0"/>
+                <a:latin typeface="Amiri" pitchFamily="2" charset="-78"/>
                 <a:ea typeface="Amiri" pitchFamily="2" charset="-78"/>
                 <a:cs typeface="Amiri" pitchFamily="2" charset="-78"/>
               </a:rPr>
@@ -3914,7 +3914,7 @@
                 <a:solidFill>
                   <a:srgbClr val="FFFFFF"/>
                 </a:solidFill>
-                <a:latin typeface="Calibri" pitchFamily="34" charset="0"/>
+                <a:latin typeface="Amiri" pitchFamily="2" charset="-78"/>
                 <a:ea typeface="Amiri" pitchFamily="2" charset="-78"/>
                 <a:cs typeface="Amiri" pitchFamily="2" charset="-78"/>
               </a:rPr>
@@ -3980,7 +3980,7 @@
                 <a:solidFill>
                   <a:srgbClr val="FFFFFF"/>
                 </a:solidFill>
-                <a:latin typeface="Calibri" pitchFamily="34" charset="0"/>
+                <a:latin typeface="Amiri" pitchFamily="2" charset="-78"/>
                 <a:ea typeface="Amiri" pitchFamily="2" charset="-78"/>
                 <a:cs typeface="Amiri" pitchFamily="2" charset="-78"/>
               </a:rPr>
@@ -4046,7 +4046,7 @@
                 <a:solidFill>
                   <a:srgbClr val="FFFFFF"/>
                 </a:solidFill>
-                <a:latin typeface="Calibri" pitchFamily="34" charset="0"/>
+                <a:latin typeface="Amiri" pitchFamily="2" charset="-78"/>
                 <a:ea typeface="Amiri" pitchFamily="2" charset="-78"/>
                 <a:cs typeface="Amiri" pitchFamily="2" charset="-78"/>
               </a:rPr>
@@ -4844,7 +4844,7 @@
                 <a:solidFill>
                   <a:srgbClr val="FFFFFF"/>
                 </a:solidFill>
-                <a:latin typeface="Calibri" pitchFamily="34" charset="0"/>
+                <a:latin typeface="Amiri" pitchFamily="2" charset="-78"/>
                 <a:ea typeface="Amiri" pitchFamily="2" charset="-78"/>
                 <a:cs typeface="Amiri" pitchFamily="2" charset="-78"/>
               </a:rPr>
@@ -4910,7 +4910,7 @@
                 <a:solidFill>
                   <a:srgbClr val="FFFFFF"/>
                 </a:solidFill>
-                <a:latin typeface="Calibri" pitchFamily="34" charset="0"/>
+                <a:latin typeface="Amiri" pitchFamily="2" charset="-78"/>
                 <a:ea typeface="Amiri" pitchFamily="2" charset="-78"/>
                 <a:cs typeface="Amiri" pitchFamily="2" charset="-78"/>
               </a:rPr>
@@ -4976,7 +4976,7 @@
                 <a:solidFill>
                   <a:srgbClr val="FFFFFF"/>
                 </a:solidFill>
-                <a:latin typeface="Calibri" pitchFamily="34" charset="0"/>
+                <a:latin typeface="Amiri" pitchFamily="2" charset="-78"/>
                 <a:ea typeface="Amiri" pitchFamily="2" charset="-78"/>
                 <a:cs typeface="Amiri" pitchFamily="2" charset="-78"/>
               </a:rPr>
@@ -5042,7 +5042,7 @@
                 <a:solidFill>
                   <a:srgbClr val="FFFFFF"/>
                 </a:solidFill>
-                <a:latin typeface="Calibri" pitchFamily="34" charset="0"/>
+                <a:latin typeface="Amiri" pitchFamily="2" charset="-78"/>
                 <a:ea typeface="Amiri" pitchFamily="2" charset="-78"/>
                 <a:cs typeface="Amiri" pitchFamily="2" charset="-78"/>
               </a:rPr>
@@ -8599,7 +8599,7 @@
                 <a:solidFill>
                   <a:srgbClr val="FFFFFF"/>
                 </a:solidFill>
-                <a:latin typeface="Calibri" pitchFamily="34" charset="0"/>
+                <a:latin typeface="Amiri" pitchFamily="2" charset="-78"/>
                 <a:ea typeface="Amiri" pitchFamily="2" charset="-78"/>
                 <a:cs typeface="Amiri" pitchFamily="2" charset="-78"/>
               </a:rPr>
@@ -8665,7 +8665,7 @@
                 <a:solidFill>
                   <a:srgbClr val="FFFFFF"/>
                 </a:solidFill>
-                <a:latin typeface="Calibri" pitchFamily="34" charset="0"/>
+                <a:latin typeface="Amiri" pitchFamily="2" charset="-78"/>
                 <a:ea typeface="Amiri" pitchFamily="2" charset="-78"/>
                 <a:cs typeface="Amiri" pitchFamily="2" charset="-78"/>
               </a:rPr>
@@ -8731,7 +8731,7 @@
                 <a:solidFill>
                   <a:srgbClr val="FFFFFF"/>
                 </a:solidFill>
-                <a:latin typeface="Calibri" pitchFamily="34" charset="0"/>
+                <a:latin typeface="Amiri" pitchFamily="2" charset="-78"/>
                 <a:ea typeface="Amiri" pitchFamily="2" charset="-78"/>
                 <a:cs typeface="Amiri" pitchFamily="2" charset="-78"/>
               </a:rPr>
@@ -8797,7 +8797,7 @@
                 <a:solidFill>
                   <a:srgbClr val="FFFFFF"/>
                 </a:solidFill>
-                <a:latin typeface="Calibri" pitchFamily="34" charset="0"/>
+                <a:latin typeface="Amiri" pitchFamily="2" charset="-78"/>
                 <a:ea typeface="Amiri" pitchFamily="2" charset="-78"/>
                 <a:cs typeface="Amiri" pitchFamily="2" charset="-78"/>
               </a:rPr>
@@ -9584,7 +9584,7 @@
                 <a:solidFill>
                   <a:srgbClr val="FFFFFF"/>
                 </a:solidFill>
-                <a:latin typeface="Calibri" pitchFamily="34" charset="0"/>
+                <a:latin typeface="Amiri" pitchFamily="2" charset="-78"/>
                 <a:ea typeface="Amiri" pitchFamily="2" charset="-78"/>
                 <a:cs typeface="Amiri" pitchFamily="2" charset="-78"/>
               </a:rPr>
@@ -9650,7 +9650,7 @@
                 <a:solidFill>
                   <a:srgbClr val="FFFFFF"/>
                 </a:solidFill>
-                <a:latin typeface="Calibri" pitchFamily="34" charset="0"/>
+                <a:latin typeface="Amiri" pitchFamily="2" charset="-78"/>
                 <a:ea typeface="Amiri" pitchFamily="2" charset="-78"/>
                 <a:cs typeface="Amiri" pitchFamily="2" charset="-78"/>
               </a:rPr>
@@ -9716,7 +9716,7 @@
                 <a:solidFill>
                   <a:srgbClr val="FFFFFF"/>
                 </a:solidFill>
-                <a:latin typeface="Calibri" pitchFamily="34" charset="0"/>
+                <a:latin typeface="Amiri" pitchFamily="2" charset="-78"/>
                 <a:ea typeface="Amiri" pitchFamily="2" charset="-78"/>
                 <a:cs typeface="Amiri" pitchFamily="2" charset="-78"/>
               </a:rPr>
@@ -9782,7 +9782,7 @@
                 <a:solidFill>
                   <a:srgbClr val="FFFFFF"/>
                 </a:solidFill>
-                <a:latin typeface="Calibri" pitchFamily="34" charset="0"/>
+                <a:latin typeface="Amiri" pitchFamily="2" charset="-78"/>
                 <a:ea typeface="Amiri" pitchFamily="2" charset="-78"/>
                 <a:cs typeface="Amiri" pitchFamily="2" charset="-78"/>
               </a:rPr>
@@ -10569,7 +10569,7 @@
                 <a:solidFill>
                   <a:srgbClr val="FFFFFF"/>
                 </a:solidFill>
-                <a:latin typeface="Calibri" pitchFamily="34" charset="0"/>
+                <a:latin typeface="Amiri" pitchFamily="2" charset="-78"/>
                 <a:ea typeface="Amiri" pitchFamily="2" charset="-78"/>
                 <a:cs typeface="Amiri" pitchFamily="2" charset="-78"/>
               </a:rPr>
@@ -10635,7 +10635,7 @@
                 <a:solidFill>
                   <a:srgbClr val="FFFFFF"/>
                 </a:solidFill>
-                <a:latin typeface="Calibri" pitchFamily="34" charset="0"/>
+                <a:latin typeface="Amiri" pitchFamily="2" charset="-78"/>
                 <a:ea typeface="Amiri" pitchFamily="2" charset="-78"/>
                 <a:cs typeface="Amiri" pitchFamily="2" charset="-78"/>
               </a:rPr>
@@ -10701,7 +10701,7 @@
                 <a:solidFill>
                   <a:srgbClr val="FFFFFF"/>
                 </a:solidFill>
-                <a:latin typeface="Calibri" pitchFamily="34" charset="0"/>
+                <a:latin typeface="Amiri" pitchFamily="2" charset="-78"/>
                 <a:ea typeface="Amiri" pitchFamily="2" charset="-78"/>
                 <a:cs typeface="Amiri" pitchFamily="2" charset="-78"/>
               </a:rPr>
@@ -10767,7 +10767,7 @@
                 <a:solidFill>
                   <a:srgbClr val="FFFFFF"/>
                 </a:solidFill>
-                <a:latin typeface="Calibri" pitchFamily="34" charset="0"/>
+                <a:latin typeface="Amiri" pitchFamily="2" charset="-78"/>
                 <a:ea typeface="Amiri" pitchFamily="2" charset="-78"/>
                 <a:cs typeface="Amiri" pitchFamily="2" charset="-78"/>
               </a:rPr>
